--- a/figures/Fig1_main_results_v2.pptx
+++ b/figures/Fig1_main_results_v2.pptx
@@ -4470,8 +4470,8 @@
           </p:nvSpPr>
           <p:spPr>
             <a:xfrm>
-              <a:off x="4663014" y="2383471"/>
-              <a:ext cx="655654" cy="606611"/>
+              <a:off x="4501805" y="2328607"/>
+              <a:ext cx="978072" cy="716339"/>
             </a:xfrm>
             <a:prstGeom prst="rect">
               <a:avLst/>
@@ -4496,8 +4496,8 @@
           </p:nvSpPr>
           <p:spPr>
             <a:xfrm>
-              <a:off x="4719950" y="2451106"/>
-              <a:ext cx="541782" cy="72786"/>
+              <a:off x="4558741" y="2396242"/>
+              <a:ext cx="858255" cy="72786"/>
             </a:xfrm>
             <a:prstGeom prst="rect">
               <a:avLst/>
@@ -4526,20 +4526,63 @@
                   <a:latin typeface="Arial"/>
                   <a:cs typeface="Arial"/>
                 </a:rPr>
-                <a:t>SDM buffer</a:t>
+                <a:t>Minimum suitable</a:t>
               </a:r>
             </a:p>
           </p:txBody>
         </p:sp>
         <p:sp>
           <p:nvSpPr>
-            <p:cNvPr id="62" name="rc62"/>
-            <p:cNvSpPr/>
-            <p:nvPr/>
-          </p:nvSpPr>
-          <p:spPr>
-            <a:xfrm>
-              <a:off x="4719950" y="2591527"/>
+            <p:cNvPr id="62" name="tx62"/>
+            <p:cNvSpPr/>
+            <p:nvPr/>
+          </p:nvSpPr>
+          <p:spPr>
+            <a:xfrm>
+              <a:off x="4558741" y="2505970"/>
+              <a:ext cx="864199" cy="72786"/>
+            </a:xfrm>
+            <a:prstGeom prst="rect">
+              <a:avLst/>
+            </a:prstGeom>
+            <a:noFill/>
+          </p:spPr>
+          <p:txBody>
+            <a:bodyPr lIns="0" rIns="0" tIns="0" bIns="0" anchorCtr="1" anchor="ctr" wrap="none"/>
+            <a:lstStyle/>
+            <a:p>
+              <a:pPr algn="l" marL="0" marR="0" indent="0">
+                <a:spcBef>
+                  <a:spcPts val="0"/>
+                </a:spcBef>
+                <a:spcAft>
+                  <a:spcPts val="0"/>
+                </a:spcAft>
+              </a:pPr>
+              <a:r>
+                <a:rPr sz="800" i="0" b="1">
+                  <a:solidFill>
+                    <a:srgbClr val="000000">
+                      <a:alpha val="100000"/>
+                    </a:srgbClr>
+                  </a:solidFill>
+                  <a:latin typeface="Arial"/>
+                  <a:cs typeface="Arial"/>
+                </a:rPr>
+                <a:t>cells per province</a:t>
+              </a:r>
+            </a:p>
+          </p:txBody>
+        </p:sp>
+        <p:sp>
+          <p:nvSpPr>
+            <p:cNvPr id="63" name="rc63"/>
+            <p:cNvSpPr/>
+            <p:nvPr/>
+          </p:nvSpPr>
+          <p:spPr>
+            <a:xfrm>
+              <a:off x="4558741" y="2646391"/>
               <a:ext cx="113872" cy="113872"/>
             </a:xfrm>
             <a:prstGeom prst="rect">
@@ -4559,13 +4602,13 @@
         </p:sp>
         <p:sp>
           <p:nvSpPr>
-            <p:cNvPr id="63" name="pl63"/>
-            <p:cNvSpPr/>
-            <p:nvPr/>
-          </p:nvSpPr>
-          <p:spPr>
-            <a:xfrm>
-              <a:off x="4731337" y="2648464"/>
+            <p:cNvPr id="64" name="pl64"/>
+            <p:cNvSpPr/>
+            <p:nvPr/>
+          </p:nvSpPr>
+          <p:spPr>
+            <a:xfrm>
+              <a:off x="4570129" y="2703328"/>
               <a:ext cx="91098" cy="0"/>
             </a:xfrm>
             <a:custGeom>
@@ -4599,13 +4642,13 @@
         </p:sp>
         <p:sp>
           <p:nvSpPr>
-            <p:cNvPr id="64" name="pt64"/>
-            <p:cNvSpPr/>
-            <p:nvPr/>
-          </p:nvSpPr>
-          <p:spPr>
-            <a:xfrm>
-              <a:off x="4747458" y="2619036"/>
+            <p:cNvPr id="65" name="pt65"/>
+            <p:cNvSpPr/>
+            <p:nvPr/>
+          </p:nvSpPr>
+          <p:spPr>
+            <a:xfrm>
+              <a:off x="4586250" y="2673900"/>
               <a:ext cx="58856" cy="58856"/>
             </a:xfrm>
             <a:prstGeom prst="ellipse">
@@ -4634,13 +4677,13 @@
         </p:sp>
         <p:sp>
           <p:nvSpPr>
-            <p:cNvPr id="65" name="rc65"/>
-            <p:cNvSpPr/>
-            <p:nvPr/>
-          </p:nvSpPr>
-          <p:spPr>
-            <a:xfrm>
-              <a:off x="4719950" y="2705400"/>
+            <p:cNvPr id="66" name="rc66"/>
+            <p:cNvSpPr/>
+            <p:nvPr/>
+          </p:nvSpPr>
+          <p:spPr>
+            <a:xfrm>
+              <a:off x="4558741" y="2760264"/>
               <a:ext cx="113872" cy="113872"/>
             </a:xfrm>
             <a:prstGeom prst="rect">
@@ -4660,13 +4703,13 @@
         </p:sp>
         <p:sp>
           <p:nvSpPr>
-            <p:cNvPr id="66" name="pl66"/>
-            <p:cNvSpPr/>
-            <p:nvPr/>
-          </p:nvSpPr>
-          <p:spPr>
-            <a:xfrm>
-              <a:off x="4731337" y="2762337"/>
+            <p:cNvPr id="67" name="pl67"/>
+            <p:cNvSpPr/>
+            <p:nvPr/>
+          </p:nvSpPr>
+          <p:spPr>
+            <a:xfrm>
+              <a:off x="4570129" y="2817201"/>
               <a:ext cx="91098" cy="0"/>
             </a:xfrm>
             <a:custGeom>
@@ -4700,13 +4743,13 @@
         </p:sp>
         <p:sp>
           <p:nvSpPr>
-            <p:cNvPr id="67" name="pt67"/>
-            <p:cNvSpPr/>
-            <p:nvPr/>
-          </p:nvSpPr>
-          <p:spPr>
-            <a:xfrm>
-              <a:off x="4747458" y="2732909"/>
+            <p:cNvPr id="68" name="pt68"/>
+            <p:cNvSpPr/>
+            <p:nvPr/>
+          </p:nvSpPr>
+          <p:spPr>
+            <a:xfrm>
+              <a:off x="4586250" y="2787773"/>
               <a:ext cx="58856" cy="58856"/>
             </a:xfrm>
             <a:prstGeom prst="ellipse">
@@ -4735,13 +4778,13 @@
         </p:sp>
         <p:sp>
           <p:nvSpPr>
-            <p:cNvPr id="68" name="rc68"/>
-            <p:cNvSpPr/>
-            <p:nvPr/>
-          </p:nvSpPr>
-          <p:spPr>
-            <a:xfrm>
-              <a:off x="4719950" y="2819273"/>
+            <p:cNvPr id="69" name="rc69"/>
+            <p:cNvSpPr/>
+            <p:nvPr/>
+          </p:nvSpPr>
+          <p:spPr>
+            <a:xfrm>
+              <a:off x="4558741" y="2874137"/>
               <a:ext cx="113872" cy="113872"/>
             </a:xfrm>
             <a:prstGeom prst="rect">
@@ -4761,13 +4804,13 @@
         </p:sp>
         <p:sp>
           <p:nvSpPr>
-            <p:cNvPr id="69" name="pl69"/>
-            <p:cNvSpPr/>
-            <p:nvPr/>
-          </p:nvSpPr>
-          <p:spPr>
-            <a:xfrm>
-              <a:off x="4731337" y="2876210"/>
+            <p:cNvPr id="70" name="pl70"/>
+            <p:cNvSpPr/>
+            <p:nvPr/>
+          </p:nvSpPr>
+          <p:spPr>
+            <a:xfrm>
+              <a:off x="4570129" y="2931074"/>
               <a:ext cx="91098" cy="0"/>
             </a:xfrm>
             <a:custGeom>
@@ -4801,13 +4844,13 @@
         </p:sp>
         <p:sp>
           <p:nvSpPr>
-            <p:cNvPr id="70" name="pt70"/>
-            <p:cNvSpPr/>
-            <p:nvPr/>
-          </p:nvSpPr>
-          <p:spPr>
-            <a:xfrm>
-              <a:off x="4747458" y="2846782"/>
+            <p:cNvPr id="71" name="pt71"/>
+            <p:cNvSpPr/>
+            <p:nvPr/>
+          </p:nvSpPr>
+          <p:spPr>
+            <a:xfrm>
+              <a:off x="4586250" y="2901646"/>
               <a:ext cx="58856" cy="58856"/>
             </a:xfrm>
             <a:prstGeom prst="ellipse">
@@ -4836,14 +4879,14 @@
         </p:sp>
         <p:sp>
           <p:nvSpPr>
-            <p:cNvPr id="71" name="tx71"/>
-            <p:cNvSpPr/>
-            <p:nvPr/>
-          </p:nvSpPr>
-          <p:spPr>
-            <a:xfrm>
-              <a:off x="4890759" y="2612071"/>
-              <a:ext cx="276697" cy="72786"/>
+            <p:cNvPr id="72" name="tx72"/>
+            <p:cNvSpPr/>
+            <p:nvPr/>
+          </p:nvSpPr>
+          <p:spPr>
+            <a:xfrm>
+              <a:off x="4729551" y="2666935"/>
+              <a:ext cx="344637" cy="72786"/>
             </a:xfrm>
             <a:prstGeom prst="rect">
               <a:avLst/>
@@ -4872,21 +4915,21 @@
                   <a:latin typeface="Arial"/>
                   <a:cs typeface="Arial"/>
                 </a:rPr>
-                <a:t>50 km</a:t>
+                <a:t>50 cells</a:t>
               </a:r>
             </a:p>
           </p:txBody>
         </p:sp>
         <p:sp>
           <p:nvSpPr>
-            <p:cNvPr id="72" name="tx72"/>
-            <p:cNvSpPr/>
-            <p:nvPr/>
-          </p:nvSpPr>
-          <p:spPr>
-            <a:xfrm>
-              <a:off x="4890759" y="2725944"/>
-              <a:ext cx="333207" cy="72786"/>
+            <p:cNvPr id="73" name="tx73"/>
+            <p:cNvSpPr/>
+            <p:nvPr/>
+          </p:nvSpPr>
+          <p:spPr>
+            <a:xfrm>
+              <a:off x="4729551" y="2780808"/>
+              <a:ext cx="401147" cy="72786"/>
             </a:xfrm>
             <a:prstGeom prst="rect">
               <a:avLst/>
@@ -4915,21 +4958,21 @@
                   <a:latin typeface="Arial"/>
                   <a:cs typeface="Arial"/>
                 </a:rPr>
-                <a:t>100 km</a:t>
+                <a:t>100 cells</a:t>
               </a:r>
             </a:p>
           </p:txBody>
         </p:sp>
         <p:sp>
           <p:nvSpPr>
-            <p:cNvPr id="73" name="tx73"/>
-            <p:cNvSpPr/>
-            <p:nvPr/>
-          </p:nvSpPr>
-          <p:spPr>
-            <a:xfrm>
-              <a:off x="4890759" y="2839817"/>
-              <a:ext cx="333207" cy="72786"/>
+            <p:cNvPr id="74" name="tx74"/>
+            <p:cNvSpPr/>
+            <p:nvPr/>
+          </p:nvSpPr>
+          <p:spPr>
+            <a:xfrm>
+              <a:off x="4729551" y="2894681"/>
+              <a:ext cx="401147" cy="72786"/>
             </a:xfrm>
             <a:prstGeom prst="rect">
               <a:avLst/>
@@ -4958,14 +5001,14 @@
                   <a:latin typeface="Arial"/>
                   <a:cs typeface="Arial"/>
                 </a:rPr>
-                <a:t>200 km</a:t>
+                <a:t>200 cells</a:t>
               </a:r>
             </a:p>
           </p:txBody>
         </p:sp>
         <p:sp>
           <p:nvSpPr>
-            <p:cNvPr id="74" name="tx74"/>
+            <p:cNvPr id="75" name="tx75"/>
             <p:cNvSpPr/>
             <p:nvPr/>
           </p:nvSpPr>
@@ -5008,7 +5051,7 @@
         </p:sp>
         <p:sp>
           <p:nvSpPr>
-            <p:cNvPr id="75" name="tx75"/>
+            <p:cNvPr id="76" name="tx76"/>
             <p:cNvSpPr/>
             <p:nvPr/>
           </p:nvSpPr>
@@ -5051,7 +5094,7 @@
         </p:sp>
         <p:sp>
           <p:nvSpPr>
-            <p:cNvPr id="76" name="tx76"/>
+            <p:cNvPr id="77" name="tx77"/>
             <p:cNvSpPr/>
             <p:nvPr/>
           </p:nvSpPr>
@@ -5094,7 +5137,7 @@
         </p:sp>
         <p:sp>
           <p:nvSpPr>
-            <p:cNvPr id="77" name="rc77"/>
+            <p:cNvPr id="78" name="rc78"/>
             <p:cNvSpPr/>
             <p:nvPr/>
           </p:nvSpPr>
@@ -5120,7 +5163,7 @@
         </p:sp>
         <p:sp>
           <p:nvSpPr>
-            <p:cNvPr id="78" name="pl78"/>
+            <p:cNvPr id="79" name="pl79"/>
             <p:cNvSpPr/>
             <p:nvPr/>
           </p:nvSpPr>
@@ -5163,7 +5206,7 @@
         </p:sp>
         <p:sp>
           <p:nvSpPr>
-            <p:cNvPr id="79" name="pl79"/>
+            <p:cNvPr id="80" name="pl80"/>
             <p:cNvSpPr/>
             <p:nvPr/>
           </p:nvSpPr>
@@ -5206,7 +5249,7 @@
         </p:sp>
         <p:sp>
           <p:nvSpPr>
-            <p:cNvPr id="80" name="pl80"/>
+            <p:cNvPr id="81" name="pl81"/>
             <p:cNvSpPr/>
             <p:nvPr/>
           </p:nvSpPr>
@@ -5249,7 +5292,7 @@
         </p:sp>
         <p:sp>
           <p:nvSpPr>
-            <p:cNvPr id="81" name="pl81"/>
+            <p:cNvPr id="82" name="pl82"/>
             <p:cNvSpPr/>
             <p:nvPr/>
           </p:nvSpPr>
@@ -5292,7 +5335,7 @@
         </p:sp>
         <p:sp>
           <p:nvSpPr>
-            <p:cNvPr id="82" name="pg82"/>
+            <p:cNvPr id="83" name="pg83"/>
             <p:cNvSpPr/>
             <p:nvPr/>
           </p:nvSpPr>
@@ -5683,7 +5726,7 @@
         </p:sp>
         <p:sp>
           <p:nvSpPr>
-            <p:cNvPr id="83" name="pl83"/>
+            <p:cNvPr id="84" name="pl84"/>
             <p:cNvSpPr/>
             <p:nvPr/>
           </p:nvSpPr>
@@ -5888,7 +5931,7 @@
         </p:sp>
         <p:sp>
           <p:nvSpPr>
-            <p:cNvPr id="84" name="pl84"/>
+            <p:cNvPr id="85" name="pl85"/>
             <p:cNvSpPr/>
             <p:nvPr/>
           </p:nvSpPr>
@@ -6093,7 +6136,7 @@
         </p:sp>
         <p:sp>
           <p:nvSpPr>
-            <p:cNvPr id="85" name="pg85"/>
+            <p:cNvPr id="86" name="pg86"/>
             <p:cNvSpPr/>
             <p:nvPr/>
           </p:nvSpPr>
@@ -6484,7 +6527,7 @@
         </p:sp>
         <p:sp>
           <p:nvSpPr>
-            <p:cNvPr id="86" name="pl86"/>
+            <p:cNvPr id="87" name="pl87"/>
             <p:cNvSpPr/>
             <p:nvPr/>
           </p:nvSpPr>
@@ -6689,7 +6732,7 @@
         </p:sp>
         <p:sp>
           <p:nvSpPr>
-            <p:cNvPr id="87" name="pl87"/>
+            <p:cNvPr id="88" name="pl88"/>
             <p:cNvSpPr/>
             <p:nvPr/>
           </p:nvSpPr>
@@ -6894,7 +6937,7 @@
         </p:sp>
         <p:sp>
           <p:nvSpPr>
-            <p:cNvPr id="88" name="pg88"/>
+            <p:cNvPr id="89" name="pg89"/>
             <p:cNvSpPr/>
             <p:nvPr/>
           </p:nvSpPr>
@@ -7285,7 +7328,7 @@
         </p:sp>
         <p:sp>
           <p:nvSpPr>
-            <p:cNvPr id="89" name="pl89"/>
+            <p:cNvPr id="90" name="pl90"/>
             <p:cNvSpPr/>
             <p:nvPr/>
           </p:nvSpPr>
@@ -7490,7 +7533,7 @@
         </p:sp>
         <p:sp>
           <p:nvSpPr>
-            <p:cNvPr id="90" name="pl90"/>
+            <p:cNvPr id="91" name="pl91"/>
             <p:cNvSpPr/>
             <p:nvPr/>
           </p:nvSpPr>
@@ -7695,7 +7738,7 @@
         </p:sp>
         <p:sp>
           <p:nvSpPr>
-            <p:cNvPr id="91" name="pl91"/>
+            <p:cNvPr id="92" name="pl92"/>
             <p:cNvSpPr/>
             <p:nvPr/>
           </p:nvSpPr>
@@ -7909,7 +7952,7 @@
         </p:sp>
         <p:sp>
           <p:nvSpPr>
-            <p:cNvPr id="92" name="pl92"/>
+            <p:cNvPr id="93" name="pl93"/>
             <p:cNvSpPr/>
             <p:nvPr/>
           </p:nvSpPr>
@@ -8123,7 +8166,7 @@
         </p:sp>
         <p:sp>
           <p:nvSpPr>
-            <p:cNvPr id="93" name="pl93"/>
+            <p:cNvPr id="94" name="pl94"/>
             <p:cNvSpPr/>
             <p:nvPr/>
           </p:nvSpPr>
@@ -8337,7 +8380,7 @@
         </p:sp>
         <p:sp>
           <p:nvSpPr>
-            <p:cNvPr id="94" name="pl94"/>
+            <p:cNvPr id="95" name="pl95"/>
             <p:cNvSpPr/>
             <p:nvPr/>
           </p:nvSpPr>
@@ -8377,7 +8420,7 @@
         </p:sp>
         <p:sp>
           <p:nvSpPr>
-            <p:cNvPr id="95" name="tx95"/>
+            <p:cNvPr id="96" name="tx96"/>
             <p:cNvSpPr/>
             <p:nvPr/>
           </p:nvSpPr>
@@ -8420,7 +8463,7 @@
         </p:sp>
         <p:sp>
           <p:nvSpPr>
-            <p:cNvPr id="96" name="tx96"/>
+            <p:cNvPr id="97" name="tx97"/>
             <p:cNvSpPr/>
             <p:nvPr/>
           </p:nvSpPr>
@@ -8463,7 +8506,7 @@
         </p:sp>
         <p:sp>
           <p:nvSpPr>
-            <p:cNvPr id="97" name="tx97"/>
+            <p:cNvPr id="98" name="tx98"/>
             <p:cNvSpPr/>
             <p:nvPr/>
           </p:nvSpPr>
@@ -8506,7 +8549,7 @@
         </p:sp>
         <p:sp>
           <p:nvSpPr>
-            <p:cNvPr id="98" name="tx98"/>
+            <p:cNvPr id="99" name="tx99"/>
             <p:cNvSpPr/>
             <p:nvPr/>
           </p:nvSpPr>
@@ -8549,7 +8592,7 @@
         </p:sp>
         <p:sp>
           <p:nvSpPr>
-            <p:cNvPr id="99" name="pl99"/>
+            <p:cNvPr id="100" name="pl100"/>
             <p:cNvSpPr/>
             <p:nvPr/>
           </p:nvSpPr>
@@ -8589,7 +8632,7 @@
         </p:sp>
         <p:sp>
           <p:nvSpPr>
-            <p:cNvPr id="100" name="pl100"/>
+            <p:cNvPr id="101" name="pl101"/>
             <p:cNvSpPr/>
             <p:nvPr/>
           </p:nvSpPr>
@@ -8629,7 +8672,7 @@
         </p:sp>
         <p:sp>
           <p:nvSpPr>
-            <p:cNvPr id="101" name="pl101"/>
+            <p:cNvPr id="102" name="pl102"/>
             <p:cNvSpPr/>
             <p:nvPr/>
           </p:nvSpPr>
@@ -8669,7 +8712,7 @@
         </p:sp>
         <p:sp>
           <p:nvSpPr>
-            <p:cNvPr id="102" name="pl102"/>
+            <p:cNvPr id="103" name="pl103"/>
             <p:cNvSpPr/>
             <p:nvPr/>
           </p:nvSpPr>
@@ -8709,7 +8752,7 @@
         </p:sp>
         <p:sp>
           <p:nvSpPr>
-            <p:cNvPr id="103" name="pl103"/>
+            <p:cNvPr id="104" name="pl104"/>
             <p:cNvSpPr/>
             <p:nvPr/>
           </p:nvSpPr>
@@ -8749,7 +8792,7 @@
         </p:sp>
         <p:sp>
           <p:nvSpPr>
-            <p:cNvPr id="104" name="pl104"/>
+            <p:cNvPr id="105" name="pl105"/>
             <p:cNvSpPr/>
             <p:nvPr/>
           </p:nvSpPr>
@@ -8789,7 +8832,7 @@
         </p:sp>
         <p:sp>
           <p:nvSpPr>
-            <p:cNvPr id="105" name="pl105"/>
+            <p:cNvPr id="106" name="pl106"/>
             <p:cNvSpPr/>
             <p:nvPr/>
           </p:nvSpPr>
@@ -8829,7 +8872,7 @@
         </p:sp>
         <p:sp>
           <p:nvSpPr>
-            <p:cNvPr id="106" name="pl106"/>
+            <p:cNvPr id="107" name="pl107"/>
             <p:cNvSpPr/>
             <p:nvPr/>
           </p:nvSpPr>
@@ -8869,7 +8912,7 @@
         </p:sp>
         <p:sp>
           <p:nvSpPr>
-            <p:cNvPr id="107" name="pl107"/>
+            <p:cNvPr id="108" name="pl108"/>
             <p:cNvSpPr/>
             <p:nvPr/>
           </p:nvSpPr>
@@ -8909,7 +8952,7 @@
         </p:sp>
         <p:sp>
           <p:nvSpPr>
-            <p:cNvPr id="108" name="pl108"/>
+            <p:cNvPr id="109" name="pl109"/>
             <p:cNvSpPr/>
             <p:nvPr/>
           </p:nvSpPr>
@@ -8949,7 +8992,7 @@
         </p:sp>
         <p:sp>
           <p:nvSpPr>
-            <p:cNvPr id="109" name="tx109"/>
+            <p:cNvPr id="110" name="tx110"/>
             <p:cNvSpPr/>
             <p:nvPr/>
           </p:nvSpPr>
@@ -8992,7 +9035,7 @@
         </p:sp>
         <p:sp>
           <p:nvSpPr>
-            <p:cNvPr id="110" name="tx110"/>
+            <p:cNvPr id="111" name="tx111"/>
             <p:cNvSpPr/>
             <p:nvPr/>
           </p:nvSpPr>
@@ -9035,7 +9078,7 @@
         </p:sp>
         <p:sp>
           <p:nvSpPr>
-            <p:cNvPr id="111" name="tx111"/>
+            <p:cNvPr id="112" name="tx112"/>
             <p:cNvSpPr/>
             <p:nvPr/>
           </p:nvSpPr>
@@ -9078,7 +9121,7 @@
         </p:sp>
         <p:sp>
           <p:nvSpPr>
-            <p:cNvPr id="112" name="tx112"/>
+            <p:cNvPr id="113" name="tx113"/>
             <p:cNvSpPr/>
             <p:nvPr/>
           </p:nvSpPr>
@@ -9121,7 +9164,7 @@
         </p:sp>
         <p:sp>
           <p:nvSpPr>
-            <p:cNvPr id="113" name="tx113"/>
+            <p:cNvPr id="114" name="tx114"/>
             <p:cNvSpPr/>
             <p:nvPr/>
           </p:nvSpPr>
@@ -9164,7 +9207,7 @@
         </p:sp>
         <p:sp>
           <p:nvSpPr>
-            <p:cNvPr id="114" name="tx114"/>
+            <p:cNvPr id="115" name="tx115"/>
             <p:cNvSpPr/>
             <p:nvPr/>
           </p:nvSpPr>
@@ -9207,7 +9250,7 @@
         </p:sp>
         <p:sp>
           <p:nvSpPr>
-            <p:cNvPr id="115" name="tx115"/>
+            <p:cNvPr id="116" name="tx116"/>
             <p:cNvSpPr/>
             <p:nvPr/>
           </p:nvSpPr>
@@ -9250,7 +9293,7 @@
         </p:sp>
         <p:sp>
           <p:nvSpPr>
-            <p:cNvPr id="116" name="rc116"/>
+            <p:cNvPr id="117" name="rc117"/>
             <p:cNvSpPr/>
             <p:nvPr/>
           </p:nvSpPr>
@@ -9276,7 +9319,7 @@
         </p:sp>
         <p:sp>
           <p:nvSpPr>
-            <p:cNvPr id="117" name="rc117"/>
+            <p:cNvPr id="118" name="rc118"/>
             <p:cNvSpPr/>
             <p:nvPr/>
           </p:nvSpPr>
@@ -9302,7 +9345,7 @@
         </p:sp>
         <p:sp>
           <p:nvSpPr>
-            <p:cNvPr id="118" name="pl118"/>
+            <p:cNvPr id="119" name="pl119"/>
             <p:cNvSpPr/>
             <p:nvPr/>
           </p:nvSpPr>
@@ -9342,7 +9385,7 @@
         </p:sp>
         <p:sp>
           <p:nvSpPr>
-            <p:cNvPr id="119" name="rc119"/>
+            <p:cNvPr id="120" name="rc120"/>
             <p:cNvSpPr/>
             <p:nvPr/>
           </p:nvSpPr>
@@ -9368,7 +9411,7 @@
         </p:sp>
         <p:sp>
           <p:nvSpPr>
-            <p:cNvPr id="120" name="pl120"/>
+            <p:cNvPr id="121" name="pl121"/>
             <p:cNvSpPr/>
             <p:nvPr/>
           </p:nvSpPr>
@@ -9408,7 +9451,7 @@
         </p:sp>
         <p:sp>
           <p:nvSpPr>
-            <p:cNvPr id="121" name="rc121"/>
+            <p:cNvPr id="122" name="rc122"/>
             <p:cNvSpPr/>
             <p:nvPr/>
           </p:nvSpPr>
@@ -9434,7 +9477,7 @@
         </p:sp>
         <p:sp>
           <p:nvSpPr>
-            <p:cNvPr id="122" name="pl122"/>
+            <p:cNvPr id="123" name="pl123"/>
             <p:cNvSpPr/>
             <p:nvPr/>
           </p:nvSpPr>
@@ -9474,7 +9517,7 @@
         </p:sp>
         <p:sp>
           <p:nvSpPr>
-            <p:cNvPr id="123" name="tx123"/>
+            <p:cNvPr id="124" name="tx124"/>
             <p:cNvSpPr/>
             <p:nvPr/>
           </p:nvSpPr>
@@ -9517,7 +9560,7 @@
         </p:sp>
         <p:sp>
           <p:nvSpPr>
-            <p:cNvPr id="124" name="tx124"/>
+            <p:cNvPr id="125" name="tx125"/>
             <p:cNvSpPr/>
             <p:nvPr/>
           </p:nvSpPr>
@@ -9560,7 +9603,7 @@
         </p:sp>
         <p:sp>
           <p:nvSpPr>
-            <p:cNvPr id="125" name="tx125"/>
+            <p:cNvPr id="126" name="tx126"/>
             <p:cNvSpPr/>
             <p:nvPr/>
           </p:nvSpPr>
@@ -9603,7 +9646,7 @@
         </p:sp>
         <p:sp>
           <p:nvSpPr>
-            <p:cNvPr id="126" name="tx126"/>
+            <p:cNvPr id="127" name="tx127"/>
             <p:cNvSpPr/>
             <p:nvPr/>
           </p:nvSpPr>
@@ -9646,7 +9689,7 @@
         </p:sp>
         <p:sp>
           <p:nvSpPr>
-            <p:cNvPr id="127" name="tx127"/>
+            <p:cNvPr id="128" name="tx128"/>
             <p:cNvSpPr/>
             <p:nvPr/>
           </p:nvSpPr>
@@ -9689,7 +9732,7 @@
         </p:sp>
         <p:sp>
           <p:nvSpPr>
-            <p:cNvPr id="128" name="tx128"/>
+            <p:cNvPr id="129" name="tx129"/>
             <p:cNvSpPr/>
             <p:nvPr/>
           </p:nvSpPr>
@@ -9732,7 +9775,7 @@
         </p:sp>
         <p:sp>
           <p:nvSpPr>
-            <p:cNvPr id="129" name="rc129"/>
+            <p:cNvPr id="130" name="rc130"/>
             <p:cNvSpPr/>
             <p:nvPr/>
           </p:nvSpPr>
@@ -9767,7 +9810,7 @@
         </p:sp>
         <p:sp>
           <p:nvSpPr>
-            <p:cNvPr id="130" name="rc130"/>
+            <p:cNvPr id="131" name="rc131"/>
             <p:cNvSpPr/>
             <p:nvPr/>
           </p:nvSpPr>
@@ -9802,7 +9845,7 @@
         </p:sp>
         <p:sp>
           <p:nvSpPr>
-            <p:cNvPr id="131" name="rc131"/>
+            <p:cNvPr id="132" name="rc132"/>
             <p:cNvSpPr/>
             <p:nvPr/>
           </p:nvSpPr>
@@ -9828,7 +9871,7 @@
         </p:sp>
         <p:sp>
           <p:nvSpPr>
-            <p:cNvPr id="132" name="pl132"/>
+            <p:cNvPr id="133" name="pl133"/>
             <p:cNvSpPr/>
             <p:nvPr/>
           </p:nvSpPr>
@@ -9871,7 +9914,7 @@
         </p:sp>
         <p:sp>
           <p:nvSpPr>
-            <p:cNvPr id="133" name="pl133"/>
+            <p:cNvPr id="134" name="pl134"/>
             <p:cNvSpPr/>
             <p:nvPr/>
           </p:nvSpPr>
@@ -9914,7 +9957,7 @@
         </p:sp>
         <p:sp>
           <p:nvSpPr>
-            <p:cNvPr id="134" name="pl134"/>
+            <p:cNvPr id="135" name="pl135"/>
             <p:cNvSpPr/>
             <p:nvPr/>
           </p:nvSpPr>
@@ -9957,7 +10000,7 @@
         </p:sp>
         <p:sp>
           <p:nvSpPr>
-            <p:cNvPr id="135" name="pl135"/>
+            <p:cNvPr id="136" name="pl136"/>
             <p:cNvSpPr/>
             <p:nvPr/>
           </p:nvSpPr>
@@ -10000,7 +10043,7 @@
         </p:sp>
         <p:sp>
           <p:nvSpPr>
-            <p:cNvPr id="136" name="rc136"/>
+            <p:cNvPr id="137" name="rc137"/>
             <p:cNvSpPr/>
             <p:nvPr/>
           </p:nvSpPr>
@@ -10026,7 +10069,7 @@
         </p:sp>
         <p:sp>
           <p:nvSpPr>
-            <p:cNvPr id="137" name="rc137"/>
+            <p:cNvPr id="138" name="rc138"/>
             <p:cNvSpPr/>
             <p:nvPr/>
           </p:nvSpPr>
@@ -10052,7 +10095,7 @@
         </p:sp>
         <p:sp>
           <p:nvSpPr>
-            <p:cNvPr id="138" name="rc138"/>
+            <p:cNvPr id="139" name="rc139"/>
             <p:cNvSpPr/>
             <p:nvPr/>
           </p:nvSpPr>
@@ -10078,7 +10121,7 @@
         </p:sp>
         <p:sp>
           <p:nvSpPr>
-            <p:cNvPr id="139" name="rc139"/>
+            <p:cNvPr id="140" name="rc140"/>
             <p:cNvSpPr/>
             <p:nvPr/>
           </p:nvSpPr>
@@ -10104,7 +10147,7 @@
         </p:sp>
         <p:sp>
           <p:nvSpPr>
-            <p:cNvPr id="140" name="pl140"/>
+            <p:cNvPr id="141" name="pl141"/>
             <p:cNvSpPr/>
             <p:nvPr/>
           </p:nvSpPr>
@@ -10147,7 +10190,7 @@
         </p:sp>
         <p:sp>
           <p:nvSpPr>
-            <p:cNvPr id="141" name="rc141"/>
+            <p:cNvPr id="142" name="rc142"/>
             <p:cNvSpPr/>
             <p:nvPr/>
           </p:nvSpPr>
@@ -10173,7 +10216,7 @@
         </p:sp>
         <p:sp>
           <p:nvSpPr>
-            <p:cNvPr id="142" name="pl142"/>
+            <p:cNvPr id="143" name="pl143"/>
             <p:cNvSpPr/>
             <p:nvPr/>
           </p:nvSpPr>
@@ -10216,7 +10259,7 @@
         </p:sp>
         <p:sp>
           <p:nvSpPr>
-            <p:cNvPr id="143" name="pl143"/>
+            <p:cNvPr id="144" name="pl144"/>
             <p:cNvSpPr/>
             <p:nvPr/>
           </p:nvSpPr>
@@ -10259,7 +10302,7 @@
         </p:sp>
         <p:sp>
           <p:nvSpPr>
-            <p:cNvPr id="144" name="pl144"/>
+            <p:cNvPr id="145" name="pl145"/>
             <p:cNvSpPr/>
             <p:nvPr/>
           </p:nvSpPr>
@@ -10302,7 +10345,7 @@
         </p:sp>
         <p:sp>
           <p:nvSpPr>
-            <p:cNvPr id="145" name="rc145"/>
+            <p:cNvPr id="146" name="rc146"/>
             <p:cNvSpPr/>
             <p:nvPr/>
           </p:nvSpPr>
@@ -10328,7 +10371,7 @@
         </p:sp>
         <p:sp>
           <p:nvSpPr>
-            <p:cNvPr id="146" name="rc146"/>
+            <p:cNvPr id="147" name="rc147"/>
             <p:cNvSpPr/>
             <p:nvPr/>
           </p:nvSpPr>
@@ -10354,7 +10397,7 @@
         </p:sp>
         <p:sp>
           <p:nvSpPr>
-            <p:cNvPr id="147" name="rc147"/>
+            <p:cNvPr id="148" name="rc148"/>
             <p:cNvSpPr/>
             <p:nvPr/>
           </p:nvSpPr>
@@ -10380,7 +10423,7 @@
         </p:sp>
         <p:sp>
           <p:nvSpPr>
-            <p:cNvPr id="148" name="rc148"/>
+            <p:cNvPr id="149" name="rc149"/>
             <p:cNvSpPr/>
             <p:nvPr/>
           </p:nvSpPr>
@@ -10406,7 +10449,7 @@
         </p:sp>
         <p:sp>
           <p:nvSpPr>
-            <p:cNvPr id="149" name="pl149"/>
+            <p:cNvPr id="150" name="pl150"/>
             <p:cNvSpPr/>
             <p:nvPr/>
           </p:nvSpPr>
@@ -10449,7 +10492,7 @@
         </p:sp>
         <p:sp>
           <p:nvSpPr>
-            <p:cNvPr id="150" name="rc150"/>
+            <p:cNvPr id="151" name="rc151"/>
             <p:cNvSpPr/>
             <p:nvPr/>
           </p:nvSpPr>
@@ -10475,7 +10518,7 @@
         </p:sp>
         <p:sp>
           <p:nvSpPr>
-            <p:cNvPr id="151" name="pl151"/>
+            <p:cNvPr id="152" name="pl152"/>
             <p:cNvSpPr/>
             <p:nvPr/>
           </p:nvSpPr>
@@ -10518,7 +10561,7 @@
         </p:sp>
         <p:sp>
           <p:nvSpPr>
-            <p:cNvPr id="152" name="pl152"/>
+            <p:cNvPr id="153" name="pl153"/>
             <p:cNvSpPr/>
             <p:nvPr/>
           </p:nvSpPr>
@@ -10561,7 +10604,7 @@
         </p:sp>
         <p:sp>
           <p:nvSpPr>
-            <p:cNvPr id="153" name="pl153"/>
+            <p:cNvPr id="154" name="pl154"/>
             <p:cNvSpPr/>
             <p:nvPr/>
           </p:nvSpPr>
@@ -10604,7 +10647,7 @@
         </p:sp>
         <p:sp>
           <p:nvSpPr>
-            <p:cNvPr id="154" name="rc154"/>
+            <p:cNvPr id="155" name="rc155"/>
             <p:cNvSpPr/>
             <p:nvPr/>
           </p:nvSpPr>
@@ -10630,7 +10673,7 @@
         </p:sp>
         <p:sp>
           <p:nvSpPr>
-            <p:cNvPr id="155" name="rc155"/>
+            <p:cNvPr id="156" name="rc156"/>
             <p:cNvSpPr/>
             <p:nvPr/>
           </p:nvSpPr>
@@ -10656,7 +10699,7 @@
         </p:sp>
         <p:sp>
           <p:nvSpPr>
-            <p:cNvPr id="156" name="rc156"/>
+            <p:cNvPr id="157" name="rc157"/>
             <p:cNvSpPr/>
             <p:nvPr/>
           </p:nvSpPr>
@@ -10682,7 +10725,7 @@
         </p:sp>
         <p:sp>
           <p:nvSpPr>
-            <p:cNvPr id="157" name="rc157"/>
+            <p:cNvPr id="158" name="rc158"/>
             <p:cNvSpPr/>
             <p:nvPr/>
           </p:nvSpPr>
@@ -10708,7 +10751,7 @@
         </p:sp>
         <p:sp>
           <p:nvSpPr>
-            <p:cNvPr id="158" name="pl158"/>
+            <p:cNvPr id="159" name="pl159"/>
             <p:cNvSpPr/>
             <p:nvPr/>
           </p:nvSpPr>
@@ -10751,7 +10794,7 @@
         </p:sp>
         <p:sp>
           <p:nvSpPr>
-            <p:cNvPr id="159" name="rc159"/>
+            <p:cNvPr id="160" name="rc160"/>
             <p:cNvSpPr/>
             <p:nvPr/>
           </p:nvSpPr>
@@ -10777,7 +10820,7 @@
         </p:sp>
         <p:sp>
           <p:nvSpPr>
-            <p:cNvPr id="160" name="pl160"/>
+            <p:cNvPr id="161" name="pl161"/>
             <p:cNvSpPr/>
             <p:nvPr/>
           </p:nvSpPr>
@@ -10820,7 +10863,7 @@
         </p:sp>
         <p:sp>
           <p:nvSpPr>
-            <p:cNvPr id="161" name="pl161"/>
+            <p:cNvPr id="162" name="pl162"/>
             <p:cNvSpPr/>
             <p:nvPr/>
           </p:nvSpPr>
@@ -10863,7 +10906,7 @@
         </p:sp>
         <p:sp>
           <p:nvSpPr>
-            <p:cNvPr id="162" name="pl162"/>
+            <p:cNvPr id="163" name="pl163"/>
             <p:cNvSpPr/>
             <p:nvPr/>
           </p:nvSpPr>
@@ -10906,7 +10949,7 @@
         </p:sp>
         <p:sp>
           <p:nvSpPr>
-            <p:cNvPr id="163" name="pl163"/>
+            <p:cNvPr id="164" name="pl164"/>
             <p:cNvSpPr/>
             <p:nvPr/>
           </p:nvSpPr>
@@ -10949,7 +10992,7 @@
         </p:sp>
         <p:sp>
           <p:nvSpPr>
-            <p:cNvPr id="164" name="rc164"/>
+            <p:cNvPr id="165" name="rc165"/>
             <p:cNvSpPr/>
             <p:nvPr/>
           </p:nvSpPr>
@@ -10975,7 +11018,7 @@
         </p:sp>
         <p:sp>
           <p:nvSpPr>
-            <p:cNvPr id="165" name="rc165"/>
+            <p:cNvPr id="166" name="rc166"/>
             <p:cNvSpPr/>
             <p:nvPr/>
           </p:nvSpPr>
@@ -11001,7 +11044,7 @@
         </p:sp>
         <p:sp>
           <p:nvSpPr>
-            <p:cNvPr id="166" name="rc166"/>
+            <p:cNvPr id="167" name="rc167"/>
             <p:cNvSpPr/>
             <p:nvPr/>
           </p:nvSpPr>
@@ -11027,7 +11070,7 @@
         </p:sp>
         <p:sp>
           <p:nvSpPr>
-            <p:cNvPr id="167" name="rc167"/>
+            <p:cNvPr id="168" name="rc168"/>
             <p:cNvSpPr/>
             <p:nvPr/>
           </p:nvSpPr>
@@ -11053,7 +11096,7 @@
         </p:sp>
         <p:sp>
           <p:nvSpPr>
-            <p:cNvPr id="168" name="pl168"/>
+            <p:cNvPr id="169" name="pl169"/>
             <p:cNvSpPr/>
             <p:nvPr/>
           </p:nvSpPr>
@@ -11096,7 +11139,7 @@
         </p:sp>
         <p:sp>
           <p:nvSpPr>
-            <p:cNvPr id="169" name="tx169"/>
+            <p:cNvPr id="170" name="tx170"/>
             <p:cNvSpPr/>
             <p:nvPr/>
           </p:nvSpPr>
@@ -11139,7 +11182,7 @@
         </p:sp>
         <p:sp>
           <p:nvSpPr>
-            <p:cNvPr id="170" name="tx170"/>
+            <p:cNvPr id="171" name="tx171"/>
             <p:cNvSpPr/>
             <p:nvPr/>
           </p:nvSpPr>
@@ -11182,7 +11225,7 @@
         </p:sp>
         <p:sp>
           <p:nvSpPr>
-            <p:cNvPr id="171" name="tx171"/>
+            <p:cNvPr id="172" name="tx172"/>
             <p:cNvSpPr/>
             <p:nvPr/>
           </p:nvSpPr>
@@ -11225,7 +11268,7 @@
         </p:sp>
         <p:sp>
           <p:nvSpPr>
-            <p:cNvPr id="172" name="tx172"/>
+            <p:cNvPr id="173" name="tx173"/>
             <p:cNvSpPr/>
             <p:nvPr/>
           </p:nvSpPr>
@@ -11268,7 +11311,7 @@
         </p:sp>
         <p:sp>
           <p:nvSpPr>
-            <p:cNvPr id="173" name="pl173"/>
+            <p:cNvPr id="174" name="pl174"/>
             <p:cNvSpPr/>
             <p:nvPr/>
           </p:nvSpPr>
@@ -11308,7 +11351,7 @@
         </p:sp>
         <p:sp>
           <p:nvSpPr>
-            <p:cNvPr id="174" name="pl174"/>
+            <p:cNvPr id="175" name="pl175"/>
             <p:cNvSpPr/>
             <p:nvPr/>
           </p:nvSpPr>
@@ -11348,7 +11391,7 @@
         </p:sp>
         <p:sp>
           <p:nvSpPr>
-            <p:cNvPr id="175" name="pl175"/>
+            <p:cNvPr id="176" name="pl176"/>
             <p:cNvSpPr/>
             <p:nvPr/>
           </p:nvSpPr>
@@ -11388,7 +11431,7 @@
         </p:sp>
         <p:sp>
           <p:nvSpPr>
-            <p:cNvPr id="176" name="pl176"/>
+            <p:cNvPr id="177" name="pl177"/>
             <p:cNvSpPr/>
             <p:nvPr/>
           </p:nvSpPr>
@@ -11428,7 +11471,7 @@
         </p:sp>
         <p:sp>
           <p:nvSpPr>
-            <p:cNvPr id="177" name="pl177"/>
+            <p:cNvPr id="178" name="pl178"/>
             <p:cNvSpPr/>
             <p:nvPr/>
           </p:nvSpPr>
@@ -11468,7 +11511,7 @@
         </p:sp>
         <p:sp>
           <p:nvSpPr>
-            <p:cNvPr id="178" name="tx178"/>
+            <p:cNvPr id="179" name="tx179"/>
             <p:cNvSpPr/>
             <p:nvPr/>
           </p:nvSpPr>
@@ -11511,7 +11554,7 @@
         </p:sp>
         <p:sp>
           <p:nvSpPr>
-            <p:cNvPr id="179" name="tx179"/>
+            <p:cNvPr id="180" name="tx180"/>
             <p:cNvSpPr/>
             <p:nvPr/>
           </p:nvSpPr>
@@ -11554,7 +11597,7 @@
         </p:sp>
         <p:sp>
           <p:nvSpPr>
-            <p:cNvPr id="180" name="tx180"/>
+            <p:cNvPr id="181" name="tx181"/>
             <p:cNvSpPr/>
             <p:nvPr/>
           </p:nvSpPr>
@@ -11597,7 +11640,7 @@
         </p:sp>
         <p:sp>
           <p:nvSpPr>
-            <p:cNvPr id="181" name="tx181"/>
+            <p:cNvPr id="182" name="tx182"/>
             <p:cNvSpPr/>
             <p:nvPr/>
           </p:nvSpPr>
@@ -11640,7 +11683,7 @@
         </p:sp>
         <p:sp>
           <p:nvSpPr>
-            <p:cNvPr id="182" name="pl182"/>
+            <p:cNvPr id="183" name="pl183"/>
             <p:cNvSpPr/>
             <p:nvPr/>
           </p:nvSpPr>
@@ -11680,7 +11723,7 @@
         </p:sp>
         <p:sp>
           <p:nvSpPr>
-            <p:cNvPr id="183" name="pl183"/>
+            <p:cNvPr id="184" name="pl184"/>
             <p:cNvSpPr/>
             <p:nvPr/>
           </p:nvSpPr>
@@ -11720,7 +11763,7 @@
         </p:sp>
         <p:sp>
           <p:nvSpPr>
-            <p:cNvPr id="184" name="pl184"/>
+            <p:cNvPr id="185" name="pl185"/>
             <p:cNvSpPr/>
             <p:nvPr/>
           </p:nvSpPr>
@@ -11760,7 +11803,7 @@
         </p:sp>
         <p:sp>
           <p:nvSpPr>
-            <p:cNvPr id="185" name="pl185"/>
+            <p:cNvPr id="186" name="pl186"/>
             <p:cNvSpPr/>
             <p:nvPr/>
           </p:nvSpPr>
@@ -11800,7 +11843,7 @@
         </p:sp>
         <p:sp>
           <p:nvSpPr>
-            <p:cNvPr id="186" name="tx186"/>
+            <p:cNvPr id="187" name="tx187"/>
             <p:cNvSpPr/>
             <p:nvPr/>
           </p:nvSpPr>
@@ -11843,7 +11886,7 @@
         </p:sp>
         <p:sp>
           <p:nvSpPr>
-            <p:cNvPr id="187" name="tx187"/>
+            <p:cNvPr id="188" name="tx188"/>
             <p:cNvSpPr/>
             <p:nvPr/>
           </p:nvSpPr>
@@ -11886,7 +11929,7 @@
         </p:sp>
         <p:sp>
           <p:nvSpPr>
-            <p:cNvPr id="188" name="tx188"/>
+            <p:cNvPr id="189" name="tx189"/>
             <p:cNvSpPr/>
             <p:nvPr/>
           </p:nvSpPr>
@@ -11929,7 +11972,7 @@
         </p:sp>
         <p:sp>
           <p:nvSpPr>
-            <p:cNvPr id="189" name="pl189"/>
+            <p:cNvPr id="190" name="pl190"/>
             <p:cNvSpPr/>
             <p:nvPr/>
           </p:nvSpPr>
@@ -11969,7 +12012,7 @@
         </p:sp>
         <p:sp>
           <p:nvSpPr>
-            <p:cNvPr id="190" name="pl190"/>
+            <p:cNvPr id="191" name="pl191"/>
             <p:cNvSpPr/>
             <p:nvPr/>
           </p:nvSpPr>
@@ -12009,7 +12052,7 @@
         </p:sp>
         <p:sp>
           <p:nvSpPr>
-            <p:cNvPr id="191" name="pl191"/>
+            <p:cNvPr id="192" name="pl192"/>
             <p:cNvSpPr/>
             <p:nvPr/>
           </p:nvSpPr>
@@ -12049,7 +12092,7 @@
         </p:sp>
         <p:sp>
           <p:nvSpPr>
-            <p:cNvPr id="192" name="pl192"/>
+            <p:cNvPr id="193" name="pl193"/>
             <p:cNvSpPr/>
             <p:nvPr/>
           </p:nvSpPr>
@@ -12089,7 +12132,7 @@
         </p:sp>
         <p:sp>
           <p:nvSpPr>
-            <p:cNvPr id="193" name="tx193"/>
+            <p:cNvPr id="194" name="tx194"/>
             <p:cNvSpPr/>
             <p:nvPr/>
           </p:nvSpPr>
@@ -12132,7 +12175,7 @@
         </p:sp>
         <p:sp>
           <p:nvSpPr>
-            <p:cNvPr id="194" name="tx194"/>
+            <p:cNvPr id="195" name="tx195"/>
             <p:cNvSpPr/>
             <p:nvPr/>
           </p:nvSpPr>
@@ -12175,7 +12218,7 @@
         </p:sp>
         <p:sp>
           <p:nvSpPr>
-            <p:cNvPr id="195" name="tx195"/>
+            <p:cNvPr id="196" name="tx196"/>
             <p:cNvSpPr/>
             <p:nvPr/>
           </p:nvSpPr>
@@ -12218,7 +12261,7 @@
         </p:sp>
         <p:sp>
           <p:nvSpPr>
-            <p:cNvPr id="196" name="pl196"/>
+            <p:cNvPr id="197" name="pl197"/>
             <p:cNvSpPr/>
             <p:nvPr/>
           </p:nvSpPr>
@@ -12258,7 +12301,7 @@
         </p:sp>
         <p:sp>
           <p:nvSpPr>
-            <p:cNvPr id="197" name="pl197"/>
+            <p:cNvPr id="198" name="pl198"/>
             <p:cNvSpPr/>
             <p:nvPr/>
           </p:nvSpPr>
@@ -12298,7 +12341,7 @@
         </p:sp>
         <p:sp>
           <p:nvSpPr>
-            <p:cNvPr id="198" name="pl198"/>
+            <p:cNvPr id="199" name="pl199"/>
             <p:cNvSpPr/>
             <p:nvPr/>
           </p:nvSpPr>
@@ -12338,7 +12381,7 @@
         </p:sp>
         <p:sp>
           <p:nvSpPr>
-            <p:cNvPr id="199" name="pl199"/>
+            <p:cNvPr id="200" name="pl200"/>
             <p:cNvSpPr/>
             <p:nvPr/>
           </p:nvSpPr>
@@ -12378,7 +12421,7 @@
         </p:sp>
         <p:sp>
           <p:nvSpPr>
-            <p:cNvPr id="200" name="pl200"/>
+            <p:cNvPr id="201" name="pl201"/>
             <p:cNvSpPr/>
             <p:nvPr/>
           </p:nvSpPr>
@@ -12418,7 +12461,7 @@
         </p:sp>
         <p:sp>
           <p:nvSpPr>
-            <p:cNvPr id="201" name="tx201"/>
+            <p:cNvPr id="202" name="tx202"/>
             <p:cNvSpPr/>
             <p:nvPr/>
           </p:nvSpPr>
@@ -12461,7 +12504,7 @@
         </p:sp>
         <p:sp>
           <p:nvSpPr>
-            <p:cNvPr id="202" name="tx202"/>
+            <p:cNvPr id="203" name="tx203"/>
             <p:cNvSpPr/>
             <p:nvPr/>
           </p:nvSpPr>
@@ -12504,7 +12547,7 @@
         </p:sp>
         <p:sp>
           <p:nvSpPr>
-            <p:cNvPr id="203" name="tx203"/>
+            <p:cNvPr id="204" name="tx204"/>
             <p:cNvSpPr/>
             <p:nvPr/>
           </p:nvSpPr>
@@ -12547,7 +12590,7 @@
         </p:sp>
         <p:sp>
           <p:nvSpPr>
-            <p:cNvPr id="204" name="tx204"/>
+            <p:cNvPr id="205" name="tx205"/>
             <p:cNvSpPr/>
             <p:nvPr/>
           </p:nvSpPr>
@@ -12590,7 +12633,7 @@
         </p:sp>
         <p:sp>
           <p:nvSpPr>
-            <p:cNvPr id="205" name="pl205"/>
+            <p:cNvPr id="206" name="pl206"/>
             <p:cNvSpPr/>
             <p:nvPr/>
           </p:nvSpPr>
@@ -12630,7 +12673,7 @@
         </p:sp>
         <p:sp>
           <p:nvSpPr>
-            <p:cNvPr id="206" name="tx206"/>
+            <p:cNvPr id="207" name="tx207"/>
             <p:cNvSpPr/>
             <p:nvPr/>
           </p:nvSpPr>
@@ -12673,7 +12716,7 @@
         </p:sp>
         <p:sp>
           <p:nvSpPr>
-            <p:cNvPr id="207" name="tx207"/>
+            <p:cNvPr id="208" name="tx208"/>
             <p:cNvSpPr/>
             <p:nvPr/>
           </p:nvSpPr>
@@ -12716,7 +12759,7 @@
         </p:sp>
         <p:sp>
           <p:nvSpPr>
-            <p:cNvPr id="208" name="tx208"/>
+            <p:cNvPr id="209" name="tx209"/>
             <p:cNvSpPr/>
             <p:nvPr/>
           </p:nvSpPr>
@@ -12759,7 +12802,7 @@
         </p:sp>
         <p:sp>
           <p:nvSpPr>
-            <p:cNvPr id="209" name="tx209"/>
+            <p:cNvPr id="210" name="tx210"/>
             <p:cNvSpPr/>
             <p:nvPr/>
           </p:nvSpPr>
@@ -12802,7 +12845,7 @@
         </p:sp>
         <p:sp>
           <p:nvSpPr>
-            <p:cNvPr id="210" name="pl210"/>
+            <p:cNvPr id="211" name="pl211"/>
             <p:cNvSpPr/>
             <p:nvPr/>
           </p:nvSpPr>
@@ -12842,7 +12885,7 @@
         </p:sp>
         <p:sp>
           <p:nvSpPr>
-            <p:cNvPr id="211" name="pl211"/>
+            <p:cNvPr id="212" name="pl212"/>
             <p:cNvSpPr/>
             <p:nvPr/>
           </p:nvSpPr>
@@ -12882,7 +12925,7 @@
         </p:sp>
         <p:sp>
           <p:nvSpPr>
-            <p:cNvPr id="212" name="pl212"/>
+            <p:cNvPr id="213" name="pl213"/>
             <p:cNvSpPr/>
             <p:nvPr/>
           </p:nvSpPr>
@@ -12922,7 +12965,7 @@
         </p:sp>
         <p:sp>
           <p:nvSpPr>
-            <p:cNvPr id="213" name="pl213"/>
+            <p:cNvPr id="214" name="pl214"/>
             <p:cNvSpPr/>
             <p:nvPr/>
           </p:nvSpPr>
@@ -12962,7 +13005,7 @@
         </p:sp>
         <p:sp>
           <p:nvSpPr>
-            <p:cNvPr id="214" name="tx214"/>
+            <p:cNvPr id="215" name="tx215"/>
             <p:cNvSpPr/>
             <p:nvPr/>
           </p:nvSpPr>
@@ -13005,7 +13048,7 @@
         </p:sp>
         <p:sp>
           <p:nvSpPr>
-            <p:cNvPr id="215" name="tx215"/>
+            <p:cNvPr id="216" name="tx216"/>
             <p:cNvSpPr/>
             <p:nvPr/>
           </p:nvSpPr>
@@ -13048,7 +13091,7 @@
         </p:sp>
         <p:sp>
           <p:nvSpPr>
-            <p:cNvPr id="216" name="tx216"/>
+            <p:cNvPr id="217" name="tx217"/>
             <p:cNvSpPr/>
             <p:nvPr/>
           </p:nvSpPr>
@@ -13091,7 +13134,7 @@
         </p:sp>
         <p:sp>
           <p:nvSpPr>
-            <p:cNvPr id="217" name="tx217"/>
+            <p:cNvPr id="218" name="tx218"/>
             <p:cNvSpPr/>
             <p:nvPr/>
           </p:nvSpPr>
@@ -13134,7 +13177,7 @@
         </p:sp>
         <p:sp>
           <p:nvSpPr>
-            <p:cNvPr id="218" name="rc218"/>
+            <p:cNvPr id="219" name="rc219"/>
             <p:cNvSpPr/>
             <p:nvPr/>
           </p:nvSpPr>
@@ -13160,7 +13203,7 @@
         </p:sp>
         <p:sp>
           <p:nvSpPr>
-            <p:cNvPr id="219" name="pl219"/>
+            <p:cNvPr id="220" name="pl220"/>
             <p:cNvSpPr/>
             <p:nvPr/>
           </p:nvSpPr>
@@ -13203,7 +13246,7 @@
         </p:sp>
         <p:sp>
           <p:nvSpPr>
-            <p:cNvPr id="220" name="pl220"/>
+            <p:cNvPr id="221" name="pl221"/>
             <p:cNvSpPr/>
             <p:nvPr/>
           </p:nvSpPr>
@@ -13246,7 +13289,7 @@
         </p:sp>
         <p:sp>
           <p:nvSpPr>
-            <p:cNvPr id="221" name="pl221"/>
+            <p:cNvPr id="222" name="pl222"/>
             <p:cNvSpPr/>
             <p:nvPr/>
           </p:nvSpPr>
@@ -13289,7 +13332,7 @@
         </p:sp>
         <p:sp>
           <p:nvSpPr>
-            <p:cNvPr id="222" name="pl222"/>
+            <p:cNvPr id="223" name="pl223"/>
             <p:cNvSpPr/>
             <p:nvPr/>
           </p:nvSpPr>
@@ -13332,7 +13375,7 @@
         </p:sp>
         <p:sp>
           <p:nvSpPr>
-            <p:cNvPr id="223" name="pl223"/>
+            <p:cNvPr id="224" name="pl224"/>
             <p:cNvSpPr/>
             <p:nvPr/>
           </p:nvSpPr>
@@ -13384,7 +13427,7 @@
         </p:sp>
         <p:sp>
           <p:nvSpPr>
-            <p:cNvPr id="224" name="pt224"/>
+            <p:cNvPr id="225" name="pt225"/>
             <p:cNvSpPr/>
             <p:nvPr/>
           </p:nvSpPr>
@@ -13419,7 +13462,7 @@
         </p:sp>
         <p:sp>
           <p:nvSpPr>
-            <p:cNvPr id="225" name="pt225"/>
+            <p:cNvPr id="226" name="pt226"/>
             <p:cNvSpPr/>
             <p:nvPr/>
           </p:nvSpPr>
@@ -13454,7 +13497,7 @@
         </p:sp>
         <p:sp>
           <p:nvSpPr>
-            <p:cNvPr id="226" name="pt226"/>
+            <p:cNvPr id="227" name="pt227"/>
             <p:cNvSpPr/>
             <p:nvPr/>
           </p:nvSpPr>
@@ -13489,7 +13532,7 @@
         </p:sp>
         <p:sp>
           <p:nvSpPr>
-            <p:cNvPr id="227" name="pt227"/>
+            <p:cNvPr id="228" name="pt228"/>
             <p:cNvSpPr/>
             <p:nvPr/>
           </p:nvSpPr>
@@ -13524,7 +13567,7 @@
         </p:sp>
         <p:sp>
           <p:nvSpPr>
-            <p:cNvPr id="228" name="pt228"/>
+            <p:cNvPr id="229" name="pt229"/>
             <p:cNvSpPr/>
             <p:nvPr/>
           </p:nvSpPr>
@@ -13559,7 +13602,7 @@
         </p:sp>
         <p:sp>
           <p:nvSpPr>
-            <p:cNvPr id="229" name="pt229"/>
+            <p:cNvPr id="230" name="pt230"/>
             <p:cNvSpPr/>
             <p:nvPr/>
           </p:nvSpPr>
@@ -13594,7 +13637,7 @@
         </p:sp>
         <p:sp>
           <p:nvSpPr>
-            <p:cNvPr id="230" name="tx230"/>
+            <p:cNvPr id="231" name="tx231"/>
             <p:cNvSpPr/>
             <p:nvPr/>
           </p:nvSpPr>
@@ -13637,7 +13680,7 @@
         </p:sp>
         <p:sp>
           <p:nvSpPr>
-            <p:cNvPr id="231" name="tx231"/>
+            <p:cNvPr id="232" name="tx232"/>
             <p:cNvSpPr/>
             <p:nvPr/>
           </p:nvSpPr>
@@ -13680,7 +13723,7 @@
         </p:sp>
         <p:sp>
           <p:nvSpPr>
-            <p:cNvPr id="232" name="tx232"/>
+            <p:cNvPr id="233" name="tx233"/>
             <p:cNvSpPr/>
             <p:nvPr/>
           </p:nvSpPr>
@@ -13723,7 +13766,7 @@
         </p:sp>
         <p:sp>
           <p:nvSpPr>
-            <p:cNvPr id="233" name="tx233"/>
+            <p:cNvPr id="234" name="tx234"/>
             <p:cNvSpPr/>
             <p:nvPr/>
           </p:nvSpPr>
@@ -13766,7 +13809,7 @@
         </p:sp>
         <p:sp>
           <p:nvSpPr>
-            <p:cNvPr id="234" name="tx234"/>
+            <p:cNvPr id="235" name="tx235"/>
             <p:cNvSpPr/>
             <p:nvPr/>
           </p:nvSpPr>
@@ -13809,7 +13852,7 @@
         </p:sp>
         <p:sp>
           <p:nvSpPr>
-            <p:cNvPr id="235" name="tx235"/>
+            <p:cNvPr id="236" name="tx236"/>
             <p:cNvSpPr/>
             <p:nvPr/>
           </p:nvSpPr>
@@ -13852,7 +13895,7 @@
         </p:sp>
         <p:sp>
           <p:nvSpPr>
-            <p:cNvPr id="236" name="pl236"/>
+            <p:cNvPr id="237" name="pl237"/>
             <p:cNvSpPr/>
             <p:nvPr/>
           </p:nvSpPr>
@@ -13892,7 +13935,7 @@
         </p:sp>
         <p:sp>
           <p:nvSpPr>
-            <p:cNvPr id="237" name="tx237"/>
+            <p:cNvPr id="238" name="tx238"/>
             <p:cNvSpPr/>
             <p:nvPr/>
           </p:nvSpPr>
@@ -13935,7 +13978,7 @@
         </p:sp>
         <p:sp>
           <p:nvSpPr>
-            <p:cNvPr id="238" name="tx238"/>
+            <p:cNvPr id="239" name="tx239"/>
             <p:cNvSpPr/>
             <p:nvPr/>
           </p:nvSpPr>
@@ -13978,7 +14021,7 @@
         </p:sp>
         <p:sp>
           <p:nvSpPr>
-            <p:cNvPr id="239" name="tx239"/>
+            <p:cNvPr id="240" name="tx240"/>
             <p:cNvSpPr/>
             <p:nvPr/>
           </p:nvSpPr>
@@ -14021,7 +14064,7 @@
         </p:sp>
         <p:sp>
           <p:nvSpPr>
-            <p:cNvPr id="240" name="pl240"/>
+            <p:cNvPr id="241" name="pl241"/>
             <p:cNvSpPr/>
             <p:nvPr/>
           </p:nvSpPr>
@@ -14061,7 +14104,7 @@
         </p:sp>
         <p:sp>
           <p:nvSpPr>
-            <p:cNvPr id="241" name="pl241"/>
+            <p:cNvPr id="242" name="pl242"/>
             <p:cNvSpPr/>
             <p:nvPr/>
           </p:nvSpPr>
@@ -14101,7 +14144,7 @@
         </p:sp>
         <p:sp>
           <p:nvSpPr>
-            <p:cNvPr id="242" name="pl242"/>
+            <p:cNvPr id="243" name="pl243"/>
             <p:cNvSpPr/>
             <p:nvPr/>
           </p:nvSpPr>
@@ -14141,7 +14184,7 @@
         </p:sp>
         <p:sp>
           <p:nvSpPr>
-            <p:cNvPr id="243" name="pl243"/>
+            <p:cNvPr id="244" name="pl244"/>
             <p:cNvSpPr/>
             <p:nvPr/>
           </p:nvSpPr>
@@ -14181,7 +14224,7 @@
         </p:sp>
         <p:sp>
           <p:nvSpPr>
-            <p:cNvPr id="244" name="pl244"/>
+            <p:cNvPr id="245" name="pl245"/>
             <p:cNvSpPr/>
             <p:nvPr/>
           </p:nvSpPr>
@@ -14221,7 +14264,7 @@
         </p:sp>
         <p:sp>
           <p:nvSpPr>
-            <p:cNvPr id="245" name="pl245"/>
+            <p:cNvPr id="246" name="pl246"/>
             <p:cNvSpPr/>
             <p:nvPr/>
           </p:nvSpPr>
@@ -14261,7 +14304,7 @@
         </p:sp>
         <p:sp>
           <p:nvSpPr>
-            <p:cNvPr id="246" name="pl246"/>
+            <p:cNvPr id="247" name="pl247"/>
             <p:cNvSpPr/>
             <p:nvPr/>
           </p:nvSpPr>
@@ -14301,7 +14344,7 @@
         </p:sp>
         <p:sp>
           <p:nvSpPr>
-            <p:cNvPr id="247" name="pl247"/>
+            <p:cNvPr id="248" name="pl248"/>
             <p:cNvSpPr/>
             <p:nvPr/>
           </p:nvSpPr>
@@ -14341,7 +14384,7 @@
         </p:sp>
         <p:sp>
           <p:nvSpPr>
-            <p:cNvPr id="248" name="pl248"/>
+            <p:cNvPr id="249" name="pl249"/>
             <p:cNvSpPr/>
             <p:nvPr/>
           </p:nvSpPr>
@@ -14381,7 +14424,7 @@
         </p:sp>
         <p:sp>
           <p:nvSpPr>
-            <p:cNvPr id="249" name="pl249"/>
+            <p:cNvPr id="250" name="pl250"/>
             <p:cNvSpPr/>
             <p:nvPr/>
           </p:nvSpPr>
@@ -14421,7 +14464,7 @@
         </p:sp>
         <p:sp>
           <p:nvSpPr>
-            <p:cNvPr id="250" name="tx250"/>
+            <p:cNvPr id="251" name="tx251"/>
             <p:cNvSpPr/>
             <p:nvPr/>
           </p:nvSpPr>
@@ -14464,7 +14507,7 @@
         </p:sp>
         <p:sp>
           <p:nvSpPr>
-            <p:cNvPr id="251" name="tx251"/>
+            <p:cNvPr id="252" name="tx252"/>
             <p:cNvSpPr/>
             <p:nvPr/>
           </p:nvSpPr>
@@ -14507,7 +14550,7 @@
         </p:sp>
         <p:sp>
           <p:nvSpPr>
-            <p:cNvPr id="252" name="tx252"/>
+            <p:cNvPr id="253" name="tx253"/>
             <p:cNvSpPr/>
             <p:nvPr/>
           </p:nvSpPr>
@@ -14550,7 +14593,7 @@
         </p:sp>
         <p:sp>
           <p:nvSpPr>
-            <p:cNvPr id="253" name="tx253"/>
+            <p:cNvPr id="254" name="tx254"/>
             <p:cNvSpPr/>
             <p:nvPr/>
           </p:nvSpPr>
@@ -14593,7 +14636,7 @@
         </p:sp>
         <p:sp>
           <p:nvSpPr>
-            <p:cNvPr id="254" name="tx254"/>
+            <p:cNvPr id="255" name="tx255"/>
             <p:cNvSpPr/>
             <p:nvPr/>
           </p:nvSpPr>
@@ -14636,7 +14679,7 @@
         </p:sp>
         <p:sp>
           <p:nvSpPr>
-            <p:cNvPr id="255" name="tx255"/>
+            <p:cNvPr id="256" name="tx256"/>
             <p:cNvSpPr/>
             <p:nvPr/>
           </p:nvSpPr>
@@ -14679,7 +14722,7 @@
         </p:sp>
         <p:sp>
           <p:nvSpPr>
-            <p:cNvPr id="256" name="tx256"/>
+            <p:cNvPr id="257" name="tx257"/>
             <p:cNvSpPr/>
             <p:nvPr/>
           </p:nvSpPr>
@@ -14722,7 +14765,7 @@
         </p:sp>
         <p:sp>
           <p:nvSpPr>
-            <p:cNvPr id="257" name="tx257"/>
+            <p:cNvPr id="258" name="tx258"/>
             <p:cNvSpPr/>
             <p:nvPr/>
           </p:nvSpPr>
@@ -14765,7 +14808,7 @@
         </p:sp>
         <p:sp>
           <p:nvSpPr>
-            <p:cNvPr id="258" name="tx258"/>
+            <p:cNvPr id="259" name="tx259"/>
             <p:cNvSpPr/>
             <p:nvPr/>
           </p:nvSpPr>
@@ -14808,7 +14851,7 @@
         </p:sp>
         <p:sp>
           <p:nvSpPr>
-            <p:cNvPr id="259" name="tx259"/>
+            <p:cNvPr id="260" name="tx260"/>
             <p:cNvSpPr/>
             <p:nvPr/>
           </p:nvSpPr>
